--- a/Predikcija_cene_automobila.pptx
+++ b/Predikcija_cene_automobila.pptx
@@ -19406,8 +19406,8 @@
   <p:clrMapOvr>
     <a:masterClrMapping/>
   </p:clrMapOvr>
-  <p:transition spd="slow">
-    <p:push dir="u"/>
+  <p:transition spd="med">
+    <p:pull/>
   </p:transition>
 </p:sld>
 </file>
@@ -19610,7 +19610,7 @@
     <a:masterClrMapping/>
   </p:clrMapOvr>
   <p:transition spd="slow">
-    <p:cover/>
+    <p:push dir="u"/>
   </p:transition>
 </p:sld>
 </file>
@@ -19726,7 +19726,7 @@
     <a:masterClrMapping/>
   </p:clrMapOvr>
   <p:transition spd="slow">
-    <p:push dir="u"/>
+    <p:cover/>
   </p:transition>
 </p:sld>
 </file>
@@ -19987,8 +19987,8 @@
   <p:clrMapOvr>
     <a:masterClrMapping/>
   </p:clrMapOvr>
-  <p:transition spd="med">
-    <p:pull/>
+  <p:transition spd="slow">
+    <p:push dir="u"/>
   </p:transition>
 </p:sld>
 </file>
@@ -20454,8 +20454,8 @@
   <p:clrMapOvr>
     <a:masterClrMapping/>
   </p:clrMapOvr>
-  <p:transition spd="slow">
-    <p:push dir="u"/>
+  <p:transition spd="med">
+    <p:pull/>
   </p:transition>
 </p:sld>
 </file>
@@ -20838,7 +20838,7 @@
     <a:masterClrMapping/>
   </p:clrMapOvr>
   <p:transition spd="slow">
-    <p:cover/>
+    <p:push dir="u"/>
   </p:transition>
 </p:sld>
 </file>
@@ -21172,7 +21172,7 @@
     <a:masterClrMapping/>
   </p:clrMapOvr>
   <p:transition spd="slow">
-    <p:push dir="u"/>
+    <p:cover/>
   </p:transition>
 </p:sld>
 </file>
@@ -21438,8 +21438,8 @@
   <p:clrMapOvr>
     <a:masterClrMapping/>
   </p:clrMapOvr>
-  <p:transition spd="med">
-    <p:pull/>
+  <p:transition spd="slow">
+    <p:push dir="u"/>
   </p:transition>
 </p:sld>
 </file>
@@ -21721,8 +21721,8 @@
   <p:clrMapOvr>
     <a:masterClrMapping/>
   </p:clrMapOvr>
-  <p:transition spd="slow">
-    <p:push dir="u"/>
+  <p:transition spd="med">
+    <p:pull/>
   </p:transition>
 </p:sld>
 </file>
@@ -21908,7 +21908,7 @@
     <a:masterClrMapping/>
   </p:clrMapOvr>
   <p:transition spd="slow">
-    <p:cover/>
+    <p:push dir="u"/>
   </p:transition>
 </p:sld>
 </file>
@@ -22245,7 +22245,7 @@
     <a:masterClrMapping/>
   </p:clrMapOvr>
   <p:transition spd="slow">
-    <p:push dir="u"/>
+    <p:cover/>
   </p:transition>
 </p:sld>
 </file>
@@ -22489,8 +22489,8 @@
   <p:clrMapOvr>
     <a:masterClrMapping/>
   </p:clrMapOvr>
-  <p:transition spd="med">
-    <p:pull/>
+  <p:transition spd="slow">
+    <p:push dir="u"/>
   </p:transition>
 </p:sld>
 </file>
@@ -22834,8 +22834,8 @@
   <p:clrMapOvr>
     <a:masterClrMapping/>
   </p:clrMapOvr>
-  <p:transition spd="slow">
-    <p:push dir="u"/>
+  <p:transition spd="med">
+    <p:pull/>
   </p:transition>
 </p:sld>
 </file>
@@ -23044,7 +23044,7 @@
     <a:masterClrMapping/>
   </p:clrMapOvr>
   <p:transition spd="slow">
-    <p:cover/>
+    <p:push dir="u"/>
   </p:transition>
 </p:sld>
 </file>
@@ -23311,7 +23311,7 @@
     <a:masterClrMapping/>
   </p:clrMapOvr>
   <p:transition spd="slow">
-    <p:push dir="u"/>
+    <p:cover/>
   </p:transition>
 </p:sld>
 </file>
@@ -23470,8 +23470,8 @@
   <p:clrMapOvr>
     <a:masterClrMapping/>
   </p:clrMapOvr>
-  <p:transition spd="med">
-    <p:pull/>
+  <p:transition spd="slow">
+    <p:push dir="u"/>
   </p:transition>
 </p:sld>
 </file>
@@ -23876,8 +23876,8 @@
   <p:clrMapOvr>
     <a:masterClrMapping/>
   </p:clrMapOvr>
-  <p:transition spd="slow">
-    <p:push dir="u"/>
+  <p:transition spd="med">
+    <p:pull/>
   </p:transition>
 </p:sld>
 </file>
@@ -24024,7 +24024,7 @@
     <a:masterClrMapping/>
   </p:clrMapOvr>
   <p:transition spd="slow">
-    <p:cover/>
+    <p:push dir="u"/>
   </p:transition>
 </p:sld>
 </file>
@@ -24171,7 +24171,7 @@
     <a:masterClrMapping/>
   </p:clrMapOvr>
   <p:transition spd="slow">
-    <p:push dir="u"/>
+    <p:cover/>
   </p:transition>
 </p:sld>
 </file>
@@ -24317,8 +24317,8 @@
   <p:clrMapOvr>
     <a:masterClrMapping/>
   </p:clrMapOvr>
-  <p:transition spd="med">
-    <p:pull/>
+  <p:transition spd="slow">
+    <p:push dir="u"/>
   </p:transition>
 </p:sld>
 </file>
@@ -24676,8 +24676,8 @@
   <p:clrMapOvr>
     <a:masterClrMapping/>
   </p:clrMapOvr>
-  <p:transition spd="slow">
-    <p:push dir="u"/>
+  <p:transition spd="med">
+    <p:pull/>
   </p:transition>
 </p:sld>
 </file>
@@ -25374,7 +25374,7 @@
     <a:masterClrMapping/>
   </p:clrMapOvr>
   <p:transition spd="slow">
-    <p:cover/>
+    <p:push dir="u"/>
   </p:transition>
 </p:sld>
 </file>
@@ -25645,7 +25645,7 @@
     <a:masterClrMapping/>
   </p:clrMapOvr>
   <p:transition spd="slow">
-    <p:push dir="u"/>
+    <p:cover/>
   </p:transition>
 </p:sld>
 </file>
@@ -25760,8 +25760,8 @@
   <p:clrMapOvr>
     <a:masterClrMapping/>
   </p:clrMapOvr>
-  <p:transition spd="med">
-    <p:pull/>
+  <p:transition spd="slow">
+    <p:push dir="u"/>
   </p:transition>
 </p:sld>
 </file>
@@ -25940,8 +25940,8 @@
   <p:clrMapOvr>
     <a:masterClrMapping/>
   </p:clrMapOvr>
-  <p:transition spd="slow">
-    <p:push dir="u"/>
+  <p:transition spd="med">
+    <p:pull/>
   </p:transition>
 </p:sld>
 </file>
@@ -26127,7 +26127,7 @@
     <a:masterClrMapping/>
   </p:clrMapOvr>
   <p:transition spd="slow">
-    <p:cover/>
+    <p:push dir="u"/>
   </p:transition>
 </p:sld>
 </file>
@@ -26214,7 +26214,7 @@
     <a:masterClrMapping/>
   </p:clrMapOvr>
   <p:transition spd="slow">
-    <p:push dir="u"/>
+    <p:cover/>
   </p:transition>
 </p:sld>
 </file>
@@ -26972,8 +26972,8 @@
         </p:nvSpPr>
         <p:spPr>
           <a:xfrm>
-            <a:off x="3828165" y="1904250"/>
-            <a:ext cx="1254994" cy="667500"/>
+            <a:off x="3526974" y="1904250"/>
+            <a:ext cx="1857375" cy="667500"/>
           </a:xfrm>
           <a:prstGeom prst="rect">
             <a:avLst/>
@@ -26996,7 +26996,11 @@
             </a:pPr>
             <a:r>
               <a:rPr lang="sr-Latn-RS" dirty="0"/>
-              <a:t>4381</a:t>
+              <a:t>43</a:t>
+            </a:r>
+            <a:r>
+              <a:rPr lang="en-US" dirty="0"/>
+              <a:t>40</a:t>
             </a:r>
             <a:endParaRPr dirty="0"/>
           </a:p>
@@ -30759,8 +30763,8 @@
   <p:clrMapOvr>
     <a:masterClrMapping/>
   </p:clrMapOvr>
-  <p:transition spd="med">
-    <p:pull/>
+  <p:transition spd="slow">
+    <p:push dir="u"/>
   </p:transition>
 </p:sld>
 </file>
